--- a/docs/03_Operation_Manual_Summary.pptx
+++ b/docs/03_Operation_Manual_Summary.pptx
@@ -3651,7 +3651,7 @@
                           </a:solidFill>
                           <a:latin typeface="Segoe UI"/>
                         </a:rPr>
-                        <a:t>app.p3mai.com (pmo-service.onrender.com)</a:t>
+                        <a:t>apps.p3mai.com/pmo (origin: pmo-service.onrender.com)</a:t>
                       </a:r>
                     </a:p>
                   </a:txBody>

--- a/docs/03_Operation_Manual_Summary.pptx
+++ b/docs/03_Operation_Manual_Summary.pptx
@@ -3221,7 +3221,7 @@
                 </a:solidFill>
                 <a:latin typeface="Segoe UI Semibold"/>
               </a:rPr>
-              <a:t>P3MAI  ·  METHOD MAP</a:t>
+              <a:t>P3MAI  ·  PMO SERVICE</a:t>
             </a:r>
           </a:p>
         </p:txBody>
